--- a/Modul Minna 1/Bab 19/44. Minna 1 Tata Bahasa Bab 19 - Slide.pptx
+++ b/Modul Minna 1/Bab 19/44. Minna 1 Tata Bahasa Bab 19 - Slide.pptx
@@ -2671,7 +2671,7 @@
                 <a:ea typeface="Arial" pitchFamily="34" charset="-122"/>
                 <a:cs typeface="Arial" pitchFamily="34" charset="-120"/>
               </a:rPr>
-              <a:t>ほっかいどうへいったことがあります。</a:t>
+              <a:t>ロンボクへいったことがあります。</a:t>
             </a:r>
             <a:endParaRPr lang="en-US" sz="1700" dirty="0"/>
           </a:p>
@@ -2710,7 +2710,7 @@
                 <a:ea typeface="Arial" pitchFamily="34" charset="-122"/>
                 <a:cs typeface="Arial" pitchFamily="34" charset="-120"/>
               </a:rPr>
-              <a:t>Hokkaidou e itta koto ga arimasu</a:t>
+              <a:t>Ronbok e itta koto ga arimasu</a:t>
             </a:r>
             <a:pPr indent="0" marL="0">
               <a:buNone/>
@@ -2738,7 +2738,7 @@
                 <a:ea typeface="Arial" pitchFamily="34" charset="-122"/>
                 <a:cs typeface="Arial" pitchFamily="34" charset="-120"/>
               </a:rPr>
-              <a:t>Pernah pergi ke Hokkaido.</a:t>
+              <a:t>Pernah pergi ke Lombok.</a:t>
             </a:r>
             <a:endParaRPr lang="en-US" sz="950" dirty="0"/>
           </a:p>
